--- a/reports/uttarakhand-sir-2026-deck.pptx
+++ b/reports/uttarakhand-sir-2026-deck.pptx
@@ -2190,7 +2190,7 @@
       </p:sp>
       <p:pic>
         <p:nvPicPr>
-          <p:cNvPr id="4" name="Image 0" descr="/tmp/pack-8Tsy5x/uk-uttarakhand-1.png">    </p:cNvPr>
+          <p:cNvPr id="4" name="Image 0" descr="/tmp/pack-7qNEwO/uk-uttarakhand-1.png">    </p:cNvPr>
           <p:cNvPicPr>
             <a:picLocks noChangeAspect="1"/>
           </p:cNvPicPr>
@@ -2363,7 +2363,7 @@
       </p:sp>
       <p:pic>
         <p:nvPicPr>
-          <p:cNvPr id="4" name="Image 0" descr="/tmp/pack-8Tsy5x/uk-uttarakhand-2.png">    </p:cNvPr>
+          <p:cNvPr id="4" name="Image 0" descr="/tmp/pack-7qNEwO/uk-uttarakhand-2.png">    </p:cNvPr>
           <p:cNvPicPr>
             <a:picLocks noChangeAspect="1"/>
           </p:cNvPicPr>
@@ -2536,7 +2536,7 @@
       </p:sp>
       <p:pic>
         <p:nvPicPr>
-          <p:cNvPr id="4" name="Image 0" descr="/tmp/pack-8Tsy5x/uk-uttarakhand-3.png">    </p:cNvPr>
+          <p:cNvPr id="4" name="Image 0" descr="/tmp/pack-7qNEwO/uk-uttarakhand-3.png">    </p:cNvPr>
           <p:cNvPicPr>
             <a:picLocks noChangeAspect="1"/>
           </p:cNvPicPr>
@@ -2748,7 +2748,7 @@
       </p:sp>
       <p:pic>
         <p:nvPicPr>
-          <p:cNvPr id="4" name="Image 0" descr="/tmp/pack-8Tsy5x/uk-uttarakhand-4.png">    </p:cNvPr>
+          <p:cNvPr id="4" name="Image 0" descr="/tmp/pack-7qNEwO/uk-uttarakhand-4.png">    </p:cNvPr>
           <p:cNvPicPr>
             <a:picLocks noChangeAspect="1"/>
           </p:cNvPicPr>
@@ -2921,7 +2921,7 @@
       </p:sp>
       <p:pic>
         <p:nvPicPr>
-          <p:cNvPr id="4" name="Image 0" descr="/tmp/pack-8Tsy5x/uk-uttarakhand-5.png">    </p:cNvPr>
+          <p:cNvPr id="4" name="Image 0" descr="/tmp/pack-7qNEwO/uk-uttarakhand-5.png">    </p:cNvPr>
           <p:cNvPicPr>
             <a:picLocks noChangeAspect="1"/>
           </p:cNvPicPr>
@@ -3094,7 +3094,7 @@
       </p:sp>
       <p:pic>
         <p:nvPicPr>
-          <p:cNvPr id="4" name="Image 0" descr="/tmp/pack-8Tsy5x/uk-uttarakhand-6.png">    </p:cNvPr>
+          <p:cNvPr id="4" name="Image 0" descr="/tmp/pack-7qNEwO/uk-uttarakhand-6.png">    </p:cNvPr>
           <p:cNvPicPr>
             <a:picLocks noChangeAspect="1"/>
           </p:cNvPicPr>
@@ -3306,7 +3306,7 @@
       </p:sp>
       <p:pic>
         <p:nvPicPr>
-          <p:cNvPr id="4" name="Image 0" descr="/tmp/pack-8Tsy5x/uk-uttarakhand-7.png">    </p:cNvPr>
+          <p:cNvPr id="4" name="Image 0" descr="/tmp/pack-7qNEwO/uk-uttarakhand-7.png">    </p:cNvPr>
           <p:cNvPicPr>
             <a:picLocks noChangeAspect="1"/>
           </p:cNvPicPr>
@@ -3479,7 +3479,7 @@
       </p:sp>
       <p:pic>
         <p:nvPicPr>
-          <p:cNvPr id="4" name="Image 0" descr="/tmp/pack-8Tsy5x/uk-uttarakhand-8.png">    </p:cNvPr>
+          <p:cNvPr id="4" name="Image 0" descr="/tmp/pack-7qNEwO/uk-uttarakhand-8.png">    </p:cNvPr>
           <p:cNvPicPr>
             <a:picLocks noChangeAspect="1"/>
           </p:cNvPicPr>

--- a/reports/uttarakhand-sir-2026-deck.pptx
+++ b/reports/uttarakhand-sir-2026-deck.pptx
@@ -687,7 +687,7 @@
           <a:p>
             <a:r>
               <a:rPr lang="en-US" dirty="0"/>
-              <a:t>The draft roll left off 8.27 lakh names, 10.4 of every 100 electors, and the final roll is 8.02 lakh smaller than the roll before the revision. After the draft, 1.30 lakh names were added and 1.05 lakh removed. The net rise of 25,164 is 3.0 for every 100 left off, and it counts people enrolling for the first time, so fewer than that were put back.</a:t>
+              <a:t>The draft roll left off 8.27 lakh names, 10.4 of every 100 electors, and the final roll is 8.02 lakh smaller than the roll before the revision. After the draft, 1.30 lakh names were added and 1.05 lakh deleted. The net rise of 25,164 is 3.0 for every 100 left off, and it counts people enrolling for the first time, so fewer than that were put back.</a:t>
             </a:r>
             <a:endParaRPr lang="en-US" dirty="0"/>
           </a:p>
@@ -951,7 +951,7 @@
           <a:p>
             <a:r>
               <a:rPr lang="en-US" dirty="0"/>
-              <a:t>In 18 of the 70 constituencies more names were removed after the draft than added, and all of them are in the plains districts. Haridwar Rural removed the most, 46.7 for every 1,000 on its draft, and Ghansali (SC) the fewest, 0.7. Across the state, 18.2 were added and 14.7 removed for every 1,000 on the draft.</a:t>
+              <a:t>In 18 of the 70 constituencies more names were deleted after the draft than added, and all of them are in the plains districts. Haridwar Rural deleted the most, 46.7 for every 1,000 on its draft, and Ghansali (SC) the fewest, 0.7. Across the state, 18.2 were added and 14.7 deleted for every 1,000 on the draft.</a:t>
             </a:r>
             <a:endParaRPr lang="en-US" dirty="0"/>
           </a:p>
@@ -1039,7 +1039,7 @@
           <a:p>
             <a:r>
               <a:rPr lang="en-US" dirty="0"/>
-              <a:t>The plains districts held 60.9% of the roll before the revision, and account for 68.4% of the names left off the draft, 70.5% of the notices and 87.2% of the names removed after it. Their share grows at every step. They removed 21.3 for every 1,000 on the draft and added 21.0, so their rolls shrank by 0.3 per 1,000. The hill districts removed 4.7 and added 13.9, and their rolls grew by 9.3 per 1,000.</a:t>
+              <a:t>The plains districts held 60.9% of the roll before the revision, and account for 68.4% of the names left off the draft, 70.5% of the notices and 87.2% of the names deleted after it. Their share grows at every step. They deleted 21.3 for every 1,000 on the draft and added 21.0, so their rolls shrank by 0.3 per 1,000. The hill districts deleted 4.7 and added 13.9, and their rolls grew by 9.3 per 1,000.</a:t>
             </a:r>
             <a:endParaRPr lang="en-US" dirty="0"/>
           </a:p>
@@ -1127,7 +1127,7 @@
           <a:p>
             <a:r>
               <a:rPr lang="en-US" dirty="0"/>
-              <a:t>Dehradun removed 26.9 for every 1,000 on its draft, the most of the 13 districts. Udham Singh Nagar and Haridwar come next, at 24.4 and 18.6. Rudraprayag removed the fewest, 1.1.</a:t>
+              <a:t>Dehradun deleted 26.9 for every 1,000 on its draft, the most of the 13 districts. Udham Singh Nagar and Haridwar come next, at 24.4 and 18.6. Rudraprayag deleted the fewest, 1.1.</a:t>
             </a:r>
             <a:endParaRPr lang="en-US" dirty="0"/>
           </a:p>
@@ -1215,7 +1215,7 @@
           <a:p>
             <a:r>
               <a:rPr lang="en-US" dirty="0"/>
-              <a:t>Women were 47.8% of the draft roll and 53.0% of the names removed after it, more than their share in 63 of the 70 constituencies. In 12 the gap is 10 points or more, among them Dharchula (83.4% of 993), Didihat (78.4% of 582), Champawat (67.4% of 989) and Deoprayag (67.3% of 104). Women were also 51.3% of the names added, and 47.8% of the final roll.</a:t>
+              <a:t>Women were 47.8% of the draft roll and 53.0% of the names deleted after it, more than their share in 63 of the 70 constituencies. In 12 the gap is 10 points or more, among them Dharchula (83.4% of 993), Didihat (78.4% of 582), Champawat (67.4% of 989) and Deoprayag (67.3% of 104). Women were also 51.3% of the names added, and 47.8% of the final roll.</a:t>
             </a:r>
             <a:endParaRPr lang="en-US" dirty="0"/>
           </a:p>
@@ -1303,7 +1303,7 @@
           <a:p>
             <a:r>
               <a:rPr lang="en-US" dirty="0"/>
-              <a:t>24.31 lakh electors on the draft, 34.1 of every 100, were in line for a notice: 5.26 lakh with no mapping to the 2003 roll and 19.04 lakh with an anomaly. The constituencies with more notices removed more names after the draft (rank correlation 0.81), and the notices tie the two counts together more closely than the names left off do (0.48). The plains districts had 40.0 notices per 100 on the draft and the hills 25.2. The table does not say how many notices were served or heard in each constituency. The Indian Express reported on 3 October, from the Chief Electoral Officer's presentation, that 97,186 of the 1,04,708 names removed after the draft were electors found ineligible after a notice, and that would explain the link. The site has not seen that presentation.</a:t>
+              <a:t>24.31 lakh electors on the draft, 34.1 of every 100, were in line for a notice: 5.26 lakh with no mapping to the 2003 roll and 19.04 lakh with an anomaly. The constituencies with more notices deleted more names after the draft (rank correlation 0.81), and the notices tie the two counts together more closely than the names left off do (0.48). The plains districts had 40.0 notices per 100 on the draft and the hills 25.2. The table does not say how many notices were served or heard in each constituency. The Indian Express reported on 3 October, from the Chief Electoral Officer's presentation, that 97,186 of the 1,04,708 names deleted after the draft were electors found ineligible after a notice, and that would explain the link. The site has not seen that presentation.</a:t>
             </a:r>
             <a:endParaRPr lang="en-US" dirty="0"/>
           </a:p>
@@ -1875,7 +1875,7 @@
                 <a:ea typeface="Calibri" pitchFamily="34" charset="-122"/>
                 <a:cs typeface="Calibri" pitchFamily="34" charset="-120"/>
               </a:rPr>
-              <a:t>After the draft, 1.30 lakh names were added and 1.05 lakh removed, so the final roll of 3 October 2026 holds 25,164 more than the draft. That is 3.0 for every 100 left off.</a:t>
+              <a:t>After the draft, 1.30 lakh names were added and 1.05 lakh deleted, so the final roll of 3 October 2026 holds 25,164 more than the draft. That is 3.0 for every 100 left off.</a:t>
             </a:r>
             <a:endParaRPr lang="en-US" sz="1500" dirty="0"/>
           </a:p>
@@ -1897,7 +1897,7 @@
                 <a:ea typeface="Calibri" pitchFamily="34" charset="-122"/>
                 <a:cs typeface="Calibri" pitchFamily="34" charset="-120"/>
               </a:rPr>
-              <a:t>The four plains districts held 60.9% of the roll before the revision, and account for 68.4% of the names left off the draft and 87.2% of the names removed after it.</a:t>
+              <a:t>The four plains districts held 60.9% of the roll before the revision, and account for 68.4% of the names left off the draft and 87.2% of the names deleted after it.</a:t>
             </a:r>
             <a:endParaRPr lang="en-US" sz="1500" dirty="0"/>
           </a:p>
@@ -1919,7 +1919,7 @@
                 <a:ea typeface="Calibri" pitchFamily="34" charset="-122"/>
                 <a:cs typeface="Calibri" pitchFamily="34" charset="-120"/>
               </a:rPr>
-              <a:t>Women were 47.8% of the draft roll and 53.0% of the names removed after it, more than their share in 63 of the 70 constituencies.</a:t>
+              <a:t>Women were 47.8% of the draft roll and 53.0% of the names deleted after it, more than their share in 63 of the 70 constituencies.</a:t>
             </a:r>
             <a:endParaRPr lang="en-US" sz="1500" dirty="0"/>
           </a:p>
@@ -2190,7 +2190,7 @@
       </p:sp>
       <p:pic>
         <p:nvPicPr>
-          <p:cNvPr id="4" name="Image 0" descr="/tmp/pack-7qNEwO/uk-uttarakhand-1.png">    </p:cNvPr>
+          <p:cNvPr id="4" name="Image 0" descr="/tmp/pack-BpyxFC/uk-uttarakhand-1.png">    </p:cNvPr>
           <p:cNvPicPr>
             <a:picLocks noChangeAspect="1"/>
           </p:cNvPicPr>
@@ -2363,7 +2363,7 @@
       </p:sp>
       <p:pic>
         <p:nvPicPr>
-          <p:cNvPr id="4" name="Image 0" descr="/tmp/pack-7qNEwO/uk-uttarakhand-2.png">    </p:cNvPr>
+          <p:cNvPr id="4" name="Image 0" descr="/tmp/pack-BpyxFC/uk-uttarakhand-2.png">    </p:cNvPr>
           <p:cNvPicPr>
             <a:picLocks noChangeAspect="1"/>
           </p:cNvPicPr>
@@ -2536,7 +2536,7 @@
       </p:sp>
       <p:pic>
         <p:nvPicPr>
-          <p:cNvPr id="4" name="Image 0" descr="/tmp/pack-7qNEwO/uk-uttarakhand-3.png">    </p:cNvPr>
+          <p:cNvPr id="4" name="Image 0" descr="/tmp/pack-BpyxFC/uk-uttarakhand-3.png">    </p:cNvPr>
           <p:cNvPicPr>
             <a:picLocks noChangeAspect="1"/>
           </p:cNvPicPr>
@@ -2740,7 +2740,7 @@
                 <a:ea typeface="Cambria" pitchFamily="34" charset="-122"/>
                 <a:cs typeface="Cambria" pitchFamily="34" charset="-120"/>
               </a:rPr>
-              <a:t>In 18 of the 70 constituencies more names were removed after the draft than added, and all of them are in the plains districts.</a:t>
+              <a:t>In 18 of the 70 constituencies more names were deleted after the draft than added, and all of them are in the plains districts.</a:t>
             </a:r>
             <a:endParaRPr lang="en-US" sz="1900" dirty="0"/>
           </a:p>
@@ -2748,7 +2748,7 @@
       </p:sp>
       <p:pic>
         <p:nvPicPr>
-          <p:cNvPr id="4" name="Image 0" descr="/tmp/pack-7qNEwO/uk-uttarakhand-4.png">    </p:cNvPr>
+          <p:cNvPr id="4" name="Image 0" descr="/tmp/pack-BpyxFC/uk-uttarakhand-4.png">    </p:cNvPr>
           <p:cNvPicPr>
             <a:picLocks noChangeAspect="1"/>
           </p:cNvPicPr>
@@ -2913,7 +2913,7 @@
                 <a:ea typeface="Cambria" pitchFamily="34" charset="-122"/>
                 <a:cs typeface="Cambria" pitchFamily="34" charset="-120"/>
               </a:rPr>
-              <a:t>The plains districts held 60.9% of the roll before the revision, and account for 68.4% of the names left off the draft, 70.5% of the notices and 87.2% of the names removed after it.</a:t>
+              <a:t>The plains districts held 60.9% of the roll before the revision, and account for 68.4% of the names left off the draft, 70.5% of the notices and 87.2% of the names deleted after it.</a:t>
             </a:r>
             <a:endParaRPr lang="en-US" sz="1600" dirty="0"/>
           </a:p>
@@ -2921,7 +2921,7 @@
       </p:sp>
       <p:pic>
         <p:nvPicPr>
-          <p:cNvPr id="4" name="Image 0" descr="/tmp/pack-7qNEwO/uk-uttarakhand-5.png">    </p:cNvPr>
+          <p:cNvPr id="4" name="Image 0" descr="/tmp/pack-BpyxFC/uk-uttarakhand-5.png">    </p:cNvPr>
           <p:cNvPicPr>
             <a:picLocks noChangeAspect="1"/>
           </p:cNvPicPr>
@@ -3086,7 +3086,7 @@
                 <a:ea typeface="Cambria" pitchFamily="34" charset="-122"/>
                 <a:cs typeface="Cambria" pitchFamily="34" charset="-120"/>
               </a:rPr>
-              <a:t>Dehradun removed 26.9 for every 1,000 on its draft, the most of the 13 districts.</a:t>
+              <a:t>Dehradun deleted 26.9 for every 1,000 on its draft, the most of the 13 districts.</a:t>
             </a:r>
             <a:endParaRPr lang="en-US" sz="2200" dirty="0"/>
           </a:p>
@@ -3094,7 +3094,7 @@
       </p:sp>
       <p:pic>
         <p:nvPicPr>
-          <p:cNvPr id="4" name="Image 0" descr="/tmp/pack-7qNEwO/uk-uttarakhand-6.png">    </p:cNvPr>
+          <p:cNvPr id="4" name="Image 0" descr="/tmp/pack-BpyxFC/uk-uttarakhand-6.png">    </p:cNvPr>
           <p:cNvPicPr>
             <a:picLocks noChangeAspect="1"/>
           </p:cNvPicPr>
@@ -3149,7 +3149,7 @@
                 <a:ea typeface="Calibri" pitchFamily="34" charset="-122"/>
                 <a:cs typeface="Calibri" pitchFamily="34" charset="-120"/>
               </a:rPr>
-              <a:t>Udham Singh Nagar and Haridwar come next, at 24.4 and 18.6. Rudraprayag removed the fewest, 1.1.</a:t>
+              <a:t>Udham Singh Nagar and Haridwar come next, at 24.4 and 18.6. Rudraprayag deleted the fewest, 1.1.</a:t>
             </a:r>
             <a:endParaRPr lang="en-US" sz="1300" dirty="0"/>
           </a:p>
@@ -3298,7 +3298,7 @@
                 <a:ea typeface="Cambria" pitchFamily="34" charset="-122"/>
                 <a:cs typeface="Cambria" pitchFamily="34" charset="-120"/>
               </a:rPr>
-              <a:t>Women were 47.8% of the draft roll and 53.0% of the names removed after it, more than their share in 63 of the 70 constituencies.</a:t>
+              <a:t>Women were 47.8% of the draft roll and 53.0% of the names deleted after it, more than their share in 63 of the 70 constituencies.</a:t>
             </a:r>
             <a:endParaRPr lang="en-US" sz="1900" dirty="0"/>
           </a:p>
@@ -3306,7 +3306,7 @@
       </p:sp>
       <p:pic>
         <p:nvPicPr>
-          <p:cNvPr id="4" name="Image 0" descr="/tmp/pack-7qNEwO/uk-uttarakhand-7.png">    </p:cNvPr>
+          <p:cNvPr id="4" name="Image 0" descr="/tmp/pack-BpyxFC/uk-uttarakhand-7.png">    </p:cNvPr>
           <p:cNvPicPr>
             <a:picLocks noChangeAspect="1"/>
           </p:cNvPicPr>
@@ -3479,7 +3479,7 @@
       </p:sp>
       <p:pic>
         <p:nvPicPr>
-          <p:cNvPr id="4" name="Image 0" descr="/tmp/pack-7qNEwO/uk-uttarakhand-8.png">    </p:cNvPr>
+          <p:cNvPr id="4" name="Image 0" descr="/tmp/pack-BpyxFC/uk-uttarakhand-8.png">    </p:cNvPr>
           <p:cNvPicPr>
             <a:picLocks noChangeAspect="1"/>
           </p:cNvPicPr>
